--- a/AI CodingTools Presentation.pptx
+++ b/AI CodingTools Presentation.pptx
@@ -1872,7 +1872,7 @@
                 <a:ea typeface="Calibri" pitchFamily="34" charset="-122"/>
                 <a:cs typeface="Calibri" pitchFamily="34" charset="-120"/>
               </a:rPr>
-              <a:t>Presented by: Upendo Anderson Lema  </a:t>
+              <a:t> </a:t>
             </a:r>
             <a:endParaRPr lang="en-US" sz="1300" dirty="0"/>
           </a:p>
